--- a/slides/04_Data_Privacy_and_Ethics.pptx
+++ b/slides/04_Data_Privacy_and_Ethics.pptx
@@ -131,7 +131,7 @@
   <p:extLst>
     <p:ext uri="{521415D9-36F7-43E2-AB2F-B90AF26B5E84}">
       <p14:sectionLst xmlns:p14="http://schemas.microsoft.com/office/powerpoint/2010/main">
-        <p14:section name="Introduction" id="{354caaad-4fa7-071f-b87c-f5c25239495d}">
+        <p14:section name="Introduction" id="{66e3542d-45f6-2f4e-83af-99dab3c2cc5d}">
           <p14:sldIdLst>
             <p14:sldId id="256"/>
             <p14:sldId id="257"/>
@@ -140,7 +140,7 @@
             <p14:sldId id="260"/>
           </p14:sldIdLst>
         </p14:section>
-        <p14:section name="Personal information" id="{53f28e60-e7d9-5b08-ba40-72bcc512e838}">
+        <p14:section name="Personal information" id="{af78597b-6c83-91f5-d8ff-849d5de084d1}">
           <p14:sldIdLst>
             <p14:sldId id="261"/>
             <p14:sldId id="262"/>
@@ -148,7 +148,7 @@
             <p14:sldId id="264"/>
           </p14:sldIdLst>
         </p14:section>
-        <p14:section name="Finding personal information" id="{4605d441-dc93-e940-25b2-2ca6cf2c855b}">
+        <p14:section name="Finding personal information" id="{e788e5e9-3186-3f20-cccf-c9ffd20b4eb6}">
           <p14:sldIdLst>
             <p14:sldId id="265"/>
             <p14:sldId id="266"/>
@@ -158,7 +158,7 @@
             <p14:sldId id="270"/>
           </p14:sldIdLst>
         </p14:section>
-        <p14:section name="Removing columns we don't need" id="{360920c2-d474-15d9-4b5a-fa85221adec6}">
+        <p14:section name="Removing columns we don't need" id="{a921d153-b59e-eaae-96d7-02ac447026e3}">
           <p14:sldIdLst>
             <p14:sldId id="271"/>
             <p14:sldId id="272"/>
@@ -166,7 +166,7 @@
             <p14:sldId id="274"/>
           </p14:sldIdLst>
         </p14:section>
-        <p14:section name="Licences and attribution" id="{608b6d8d-7b68-40e8-75a2-cf89c445aa09}">
+        <p14:section name="Licences and attribution" id="{63f5b8d0-0161-7cda-56f7-dc584a35a9de}">
           <p14:sldIdLst>
             <p14:sldId id="275"/>
             <p14:sldId id="276"/>
@@ -174,7 +174,7 @@
             <p14:sldId id="278"/>
           </p14:sldIdLst>
         </p14:section>
-        <p14:section name="Wrap up" id="{9ea1010a-c893-02c4-cd4d-25f4cc277f4b}">
+        <p14:section name="Wrap up" id="{eb0ab68c-80a5-a652-e110-fd1fef246fbb}">
           <p14:sldIdLst>
             <p14:sldId id="279"/>
             <p14:sldId id="280"/>
@@ -3626,7 +3626,7 @@
               <a:t>Most of our 13 columns are about games, not people. But one holds contact details: </a:t>
             </a:r>
             <a:r>
-              <a:rPr lang="en-US" sz="1600" dirty="0">
+              <a:rPr lang="en-US" sz="1600" b="1" dirty="0">
                 <a:solidFill>
                   <a:srgbClr val="E8A55A"/>
                 </a:solidFill>
@@ -3868,7 +3868,7 @@
               <a:t>support addresses like </a:t>
             </a:r>
             <a:r>
-              <a:rPr lang="en-US" sz="1300" dirty="0">
+              <a:rPr lang="en-US" sz="1300" b="1" dirty="0">
                 <a:solidFill>
                   <a:srgbClr val="B86E1E"/>
                 </a:solidFill>
@@ -3905,7 +3905,7 @@
               <a:t>a company's own email domain, like </a:t>
             </a:r>
             <a:r>
-              <a:rPr lang="en-US" sz="1300" dirty="0">
+              <a:rPr lang="en-US" sz="1300" b="1" dirty="0">
                 <a:solidFill>
                   <a:srgbClr val="B86E1E"/>
                 </a:solidFill>
@@ -4913,7 +4913,7 @@
               <a:t> Companies usually have their own email domain, while a free Gmail address is often one person's own account. We use the same </a:t>
             </a:r>
             <a:r>
-              <a:rPr lang="en-US" sz="1300" dirty="0">
+              <a:rPr lang="en-US" sz="1300" b="1" dirty="0">
                 <a:solidFill>
                   <a:srgbClr val="B86E1E"/>
                 </a:solidFill>
@@ -4932,7 +4932,7 @@
               <a:t> and </a:t>
             </a:r>
             <a:r>
-              <a:rPr lang="en-US" sz="1300" dirty="0">
+              <a:rPr lang="en-US" sz="1300" b="1" dirty="0">
                 <a:solidFill>
                   <a:srgbClr val="B86E1E"/>
                 </a:solidFill>
@@ -5173,7 +5173,7 @@
               <a:t>Change </a:t>
             </a:r>
             <a:r>
-              <a:rPr lang="en-US" sz="1800" dirty="0">
+              <a:rPr lang="en-US" sz="1800" b="1" dirty="0">
                 <a:solidFill>
                   <a:srgbClr val="B86E1E"/>
                 </a:solidFill>
@@ -5192,7 +5192,7 @@
               <a:t> to another free email service, such as </a:t>
             </a:r>
             <a:r>
-              <a:rPr lang="en-US" sz="1800" dirty="0">
+              <a:rPr lang="en-US" sz="1800" b="1" dirty="0">
                 <a:solidFill>
                   <a:srgbClr val="B86E1E"/>
                 </a:solidFill>
@@ -5211,7 +5211,7 @@
               <a:t> or </a:t>
             </a:r>
             <a:r>
-              <a:rPr lang="en-US" sz="1800" dirty="0">
+              <a:rPr lang="en-US" sz="1800" b="1" dirty="0">
                 <a:solidFill>
                   <a:srgbClr val="B86E1E"/>
                 </a:solidFill>
@@ -5477,7 +5477,7 @@
               <a:t>Just like when we counted Indie games, </a:t>
             </a:r>
             <a:r>
-              <a:rPr lang="en-US" sz="1800" dirty="0">
+              <a:rPr lang="en-US" sz="1800" b="1" dirty="0">
                 <a:solidFill>
                   <a:srgbClr val="B86E1E"/>
                 </a:solidFill>
@@ -5496,7 +5496,7 @@
               <a:t> counts each </a:t>
             </a:r>
             <a:r>
-              <a:rPr lang="en-US" sz="1800" dirty="0">
+              <a:rPr lang="en-US" sz="1800" b="1" dirty="0">
                 <a:solidFill>
                   <a:srgbClr val="B86E1E"/>
                 </a:solidFill>
@@ -5515,7 +5515,7 @@
               <a:t> as 1. A missing email can't contain anything, so </a:t>
             </a:r>
             <a:r>
-              <a:rPr lang="en-US" sz="1800" dirty="0">
+              <a:rPr lang="en-US" sz="1800" b="1" dirty="0">
                 <a:solidFill>
                   <a:srgbClr val="B86E1E"/>
                 </a:solidFill>
@@ -5534,7 +5534,7 @@
               <a:t> gives a null for it, and </a:t>
             </a:r>
             <a:r>
-              <a:rPr lang="en-US" sz="1800" dirty="0">
+              <a:rPr lang="en-US" sz="1800" b="1" dirty="0">
                 <a:solidFill>
                   <a:srgbClr val="B86E1E"/>
                 </a:solidFill>
@@ -6408,7 +6408,7 @@
               <a:t>How many rows and columns will </a:t>
             </a:r>
             <a:r>
-              <a:rPr lang="en-US" sz="1300" dirty="0">
+              <a:rPr lang="en-US" sz="1300" b="1" dirty="0">
                 <a:solidFill>
                   <a:srgbClr val="B86E1E"/>
                 </a:solidFill>
@@ -6504,7 +6504,7 @@
               <a:t>​</a:t>
             </a:r>
             <a:r>
-              <a:rPr lang="en-US" sz="1300" dirty="0">
+              <a:rPr lang="en-US" sz="1300" b="1" dirty="0">
                 <a:solidFill>
                   <a:srgbClr val="B86E1E"/>
                 </a:solidFill>
@@ -6523,7 +6523,7 @@
               <a:t> makes a copy of our data without that column. The new name, </a:t>
             </a:r>
             <a:r>
-              <a:rPr lang="en-US" sz="1300" dirty="0">
+              <a:rPr lang="en-US" sz="1300" b="1" dirty="0">
                 <a:solidFill>
                   <a:srgbClr val="B86E1E"/>
                 </a:solidFill>
@@ -6762,7 +6762,7 @@
               <a:t>Sometimes we need part of the information without the personal details. If our question were "Do games with a support email get more recommendations?", we could replace each email with just </a:t>
             </a:r>
             <a:r>
-              <a:rPr lang="en-US" sz="1800" dirty="0">
+              <a:rPr lang="en-US" sz="1800" b="1" dirty="0">
                 <a:solidFill>
                   <a:srgbClr val="B86E1E"/>
                 </a:solidFill>
@@ -6781,7 +6781,7 @@
               <a:t> or </a:t>
             </a:r>
             <a:r>
-              <a:rPr lang="en-US" sz="1800" dirty="0">
+              <a:rPr lang="en-US" sz="1800" b="1" dirty="0">
                 <a:solidFill>
                   <a:srgbClr val="B86E1E"/>
                 </a:solidFill>
@@ -7564,7 +7564,7 @@
               <a:t>the </a:t>
             </a:r>
             <a:r>
-              <a:rPr lang="en-US" sz="1500" dirty="0">
+              <a:rPr lang="en-US" sz="1500" b="1" dirty="0">
                 <a:solidFill>
                   <a:srgbClr val="B86E1E"/>
                 </a:solidFill>
@@ -7583,7 +7583,7 @@
               <a:t> file in our </a:t>
             </a:r>
             <a:r>
-              <a:rPr lang="en-US" sz="1500" dirty="0">
+              <a:rPr lang="en-US" sz="1500" b="1" dirty="0">
                 <a:solidFill>
                   <a:srgbClr val="B86E1E"/>
                 </a:solidFill>
@@ -8181,7 +8181,7 @@
               <a:t>Is </a:t>
             </a:r>
             <a:r>
-              <a:rPr lang="en-US" sz="1800" dirty="0">
+              <a:rPr lang="en-US" sz="1800" b="1" dirty="0">
                 <a:solidFill>
                   <a:srgbClr val="E8A55A"/>
                 </a:solidFill>
@@ -8227,7 +8227,7 @@
               <a:t>What does </a:t>
             </a:r>
             <a:r>
-              <a:rPr lang="en-US" sz="1800" dirty="0">
+              <a:rPr lang="en-US" sz="1800" b="1" dirty="0">
                 <a:solidFill>
                   <a:srgbClr val="E8A55A"/>
                 </a:solidFill>
@@ -9854,7 +9854,7 @@
               <a:t>an email like </a:t>
             </a:r>
             <a:r>
-              <a:rPr lang="en-US" sz="1500" dirty="0">
+              <a:rPr lang="en-US" sz="1500" b="1" dirty="0">
                 <a:solidFill>
                   <a:srgbClr val="B86E1E"/>
                 </a:solidFill>
